--- a/public/fun/pack/pptx/birthdaypro/돌잔치프리미엄_39_감사인사중심_미드나잇실버.pptx
+++ b/public/fun/pack/pptx/birthdaypro/돌잔치프리미엄_39_감사인사중심_미드나잇실버.pptx
@@ -112,12 +112,12 @@
   <p:extLst>
     <p:ext uri="{521415D9-36F7-43E2-AB2F-B90AF26B5E84}">
       <p14:sectionLst xmlns:p14="http://schemas.microsoft.com/office/powerpoint/2010/main">
-        <p14:section name="시작" id="{13B948FF-83F6-41F6-BCC1-8133DCD21B4A}">
+        <p14:section name="시작" id="{75B75F7D-8C91-47FD-A10D-2FAB0F85250F}">
           <p14:sldIdLst>
             <p14:sldId id="256"/>
           </p14:sldIdLst>
         </p14:section>
-        <p14:section name="본문" id="{6DC74291-A315-4C43-8E97-B98D194D02E9}">
+        <p14:section name="본문" id="{BC7FE8F8-9D70-4643-9AC0-92FAE5B0A395}">
           <p14:sldIdLst>
             <p14:sldId id="257"/>
             <p14:sldId id="258"/>
@@ -125,7 +125,7 @@
             <p14:sldId id="260"/>
           </p14:sldIdLst>
         </p14:section>
-        <p14:section name="마무리" id="{BDDA212C-C424-4907-AC54-5A4F55ECE56F}">
+        <p14:section name="마무리" id="{FDB0CA7F-44E3-4533-BF53-AF56D095605C}">
           <p14:sldIdLst>
             <p14:sldId id="261"/>
           </p14:sldIdLst>
@@ -2651,7 +2651,7 @@
             </a:lvl1pPr>
           </a:lstStyle>
           <a:p>
-            <a:fld id="{1D99CF9F-5484-4891-A5E0-1A7EC9B60759}" type="slidenum">
+            <a:fld id="{EE17D30F-0E71-49A1-92D5-A3BF793732FD}" type="slidenum">
               <a:rPr lang="en-US"/>
               <a:t>‹#›</a:t>
             </a:fld>
@@ -5146,7 +5146,7 @@
             </a:lvl1pPr>
           </a:lstStyle>
           <a:p>
-            <a:fld id="{BD561A96-6293-4364-BBF0-9CACED624750}" type="slidenum">
+            <a:fld id="{E083334A-946E-4487-BDF0-A96515502426}" type="slidenum">
               <a:rPr lang="en-US"/>
               <a:t>‹#›</a:t>
             </a:fld>
@@ -6436,7 +6436,7 @@
             </a:lvl1pPr>
           </a:lstStyle>
           <a:p>
-            <a:fld id="{E5A43DCD-4347-4C99-961F-D8777C818E4E}" type="slidenum">
+            <a:fld id="{6F9D238F-2541-4FD8-9826-22500594B639}" type="slidenum">
               <a:rPr lang="en-US"/>
               <a:t>‹#›</a:t>
             </a:fld>
@@ -7961,7 +7961,7 @@
           <a:p>
             <a:r>
               <a:rPr lang="ko-KR"/>
-              <a:t>아기 이름 · 0000. 00. 00</a:t>
+              <a:t>아기 이름 · 날짜 입력</a:t>
             </a:r>
           </a:p>
           <a:p>
@@ -8123,7 +8123,7 @@
           <a:bodyPr/>
           <a:lstStyle/>
           <a:p>
-            <a:fld id="{06FA5979-C7C6-418F-9243-2CCA94EBCF6B}" type="slidenum">
+            <a:fld id="{4BAA8761-0914-41BB-8B65-84B10B49516E}" type="slidenum">
               <a:rPr lang="en-US"/>
               <a:t>‹#›</a:t>
             </a:fld>
@@ -8723,7 +8723,7 @@
           <a:bodyPr/>
           <a:lstStyle/>
           <a:p>
-            <a:fld id="{45DA97A5-D7C0-4087-B2D0-6D9E798444CD}" type="slidenum">
+            <a:fld id="{A00BBA77-56FD-4496-9894-87FE61D71850}" type="slidenum">
               <a:rPr lang="en-US"/>
               <a:t>‹#›</a:t>
             </a:fld>
@@ -9053,7 +9053,7 @@
           <a:bodyPr/>
           <a:lstStyle/>
           <a:p>
-            <a:fld id="{30D3E228-A805-40C9-888C-48A27BCB2D44}" type="slidenum">
+            <a:fld id="{8732F9E6-E115-4C2F-B622-690E277A84FF}" type="slidenum">
               <a:rPr lang="en-US"/>
               <a:t>‹#›</a:t>
             </a:fld>
@@ -9903,7 +9903,7 @@
           <a:bodyPr/>
           <a:lstStyle/>
           <a:p>
-            <a:fld id="{6CB92845-306B-4166-8906-613A5E34A25F}" type="slidenum">
+            <a:fld id="{3084D434-B0C1-4088-8F58-571AAA543E2F}" type="slidenum">
               <a:rPr lang="en-US"/>
               <a:t>‹#›</a:t>
             </a:fld>
